--- a/Slides/Semana 1/semana_1_slides.pptx
+++ b/Slides/Semana 1/semana_1_slides.pptx
@@ -2580,7 +2580,7 @@
           <a:p>
             <a:r>
               <a:rPr lang="en-US" dirty="0"/>
-              <a:t>Notas: Duas abordagens complementares, não rivais. Nesta disciplina o foco é raster/PBR pintado no 3D Coat, mas o estudante precisa reconhecer o vocabulário. O conceito volta com aplicação prática na Semana 7 (Normal Map procedural) — dizer isso em voz alta.</a:t>
+              <a:t>Notas: Duas abordagens complementares, não rivais. Nesta disciplina o foco é raster/PBR pintado no 3DCoatTextura, mas o estudante precisa reconhecer o vocabulário. O conceito volta com aplicação prática na Semana 7 (Normal Map procedural) — dizer isso em voz alta.</a:t>
             </a:r>
             <a:endParaRPr lang="en-US" dirty="0"/>
           </a:p>
